--- a/public/assets/wuzhen_waterways_presentation.pptx
+++ b/public/assets/wuzhen_waterways_presentation.pptx
@@ -3583,6 +3583,9 @@
   <p:clrMapOvr>
     <a:masterClrMapping/>
   </p:clrMapOvr>
+  <p:transition spd="med">
+    <p:fade thruBlk="0"/>
+  </p:transition>
 </p:sld>
 </file>
 
@@ -4175,6 +4178,9 @@
   <p:clrMapOvr>
     <a:masterClrMapping/>
   </p:clrMapOvr>
+  <p:transition spd="med">
+    <p:fade thruBlk="0"/>
+  </p:transition>
 </p:sld>
 </file>
 
@@ -5019,6 +5025,9 @@
   <p:clrMapOvr>
     <a:masterClrMapping/>
   </p:clrMapOvr>
+  <p:transition spd="med">
+    <p:push dir="l"/>
+  </p:transition>
 </p:sld>
 </file>
 
@@ -5918,6 +5927,9 @@
   <p:clrMapOvr>
     <a:masterClrMapping/>
   </p:clrMapOvr>
+  <p:transition spd="med">
+    <p:push dir="l"/>
+  </p:transition>
 </p:sld>
 </file>
 
@@ -6108,8 +6120,8 @@
         </p:nvSpPr>
         <p:spPr>
           <a:xfrm>
-            <a:off x="502920" y="1554480"/>
-            <a:ext cx="2560320" cy="566928"/>
+            <a:off x="502920" y="1508760"/>
+            <a:ext cx="2560320" cy="548640"/>
           </a:xfrm>
           <a:prstGeom prst="rect">
             <a:avLst/>
@@ -6154,8 +6166,8 @@
         </p:nvSpPr>
         <p:spPr>
           <a:xfrm>
-            <a:off x="502920" y="1554480"/>
-            <a:ext cx="2560320" cy="566928"/>
+            <a:off x="502920" y="1508760"/>
+            <a:ext cx="2560320" cy="548640"/>
           </a:xfrm>
           <a:prstGeom prst="rect">
             <a:avLst/>
@@ -6193,8 +6205,8 @@
         </p:nvSpPr>
         <p:spPr>
           <a:xfrm>
-            <a:off x="502920" y="2606040"/>
-            <a:ext cx="2560320" cy="566928"/>
+            <a:off x="502920" y="2331720"/>
+            <a:ext cx="2560320" cy="548640"/>
           </a:xfrm>
           <a:prstGeom prst="rect">
             <a:avLst/>
@@ -6237,8 +6249,8 @@
         </p:nvSpPr>
         <p:spPr>
           <a:xfrm>
-            <a:off x="502920" y="2606040"/>
-            <a:ext cx="2560320" cy="566928"/>
+            <a:off x="502920" y="2331720"/>
+            <a:ext cx="2560320" cy="548640"/>
           </a:xfrm>
           <a:prstGeom prst="rect">
             <a:avLst/>
@@ -6270,14 +6282,53 @@
       </p:sp>
       <p:sp>
         <p:nvSpPr>
-          <p:cNvPr id="10" name="Rectangle 9"/>
+          <p:cNvPr id="10" name="TextBox 9"/>
+          <p:cNvSpPr txBox="1"/>
+          <p:nvPr/>
+        </p:nvSpPr>
+        <p:spPr>
+          <a:xfrm>
+            <a:off x="502920" y="3017520"/>
+            <a:ext cx="2743200" cy="228600"/>
+          </a:xfrm>
+          <a:prstGeom prst="rect">
+            <a:avLst/>
+          </a:prstGeom>
+          <a:noFill/>
+        </p:spPr>
+        <p:txBody>
+          <a:bodyPr wrap="square" anchor="t" lIns="0" rIns="0" tIns="0" bIns="0">
+            <a:spAutoFit/>
+          </a:bodyPr>
+          <a:lstStyle/>
+          <a:p>
+            <a:pPr algn="ctr">
+              <a:spcAft>
+                <a:spcPts val="200"/>
+              </a:spcAft>
+            </a:pPr>
+            <a:r>
+              <a:rPr sz="1000" b="0">
+                <a:solidFill>
+                  <a:srgbClr val="8A9AA8"/>
+                </a:solidFill>
+                <a:latin typeface="Georgia"/>
+              </a:rPr>
+              <a:t>it links</a:t>
+            </a:r>
+          </a:p>
+        </p:txBody>
+      </p:sp>
+      <p:sp>
+        <p:nvSpPr>
+          <p:cNvPr id="11" name="Rectangle 10"/>
           <p:cNvSpPr/>
           <p:nvPr/>
         </p:nvSpPr>
         <p:spPr>
           <a:xfrm>
-            <a:off x="502920" y="3611880"/>
-            <a:ext cx="1078992" cy="566928"/>
+            <a:off x="502920" y="3310128"/>
+            <a:ext cx="585216" cy="548640"/>
           </a:xfrm>
           <a:prstGeom prst="rect">
             <a:avLst/>
@@ -6314,14 +6365,14 @@
       </p:sp>
       <p:sp>
         <p:nvSpPr>
-          <p:cNvPr id="11" name="TextBox 10"/>
-          <p:cNvSpPr txBox="1"/>
-          <p:nvPr/>
-        </p:nvSpPr>
-        <p:spPr>
-          <a:xfrm>
-            <a:off x="502920" y="3611880"/>
-            <a:ext cx="1078992" cy="566928"/>
+          <p:cNvPr id="12" name="TextBox 11"/>
+          <p:cNvSpPr txBox="1"/>
+          <p:nvPr/>
+        </p:nvSpPr>
+        <p:spPr>
+          <a:xfrm>
+            <a:off x="502920" y="3310128"/>
+            <a:ext cx="585216" cy="548640"/>
           </a:xfrm>
           <a:prstGeom prst="rect">
             <a:avLst/>
@@ -6340,7 +6391,7 @@
               </a:spcAft>
             </a:pPr>
             <a:r>
-              <a:rPr sz="1350" b="1">
+              <a:rPr sz="850" b="1">
                 <a:solidFill>
                   <a:srgbClr val="142634"/>
                 </a:solidFill>
@@ -6353,14 +6404,14 @@
       </p:sp>
       <p:sp>
         <p:nvSpPr>
-          <p:cNvPr id="12" name="Rectangle 11"/>
+          <p:cNvPr id="13" name="Rectangle 12"/>
           <p:cNvSpPr/>
           <p:nvPr/>
         </p:nvSpPr>
         <p:spPr>
           <a:xfrm>
-            <a:off x="1655064" y="3611880"/>
-            <a:ext cx="1078992" cy="566928"/>
+            <a:off x="1133856" y="3310128"/>
+            <a:ext cx="585216" cy="548640"/>
           </a:xfrm>
           <a:prstGeom prst="rect">
             <a:avLst/>
@@ -6397,14 +6448,14 @@
       </p:sp>
       <p:sp>
         <p:nvSpPr>
-          <p:cNvPr id="13" name="TextBox 12"/>
-          <p:cNvSpPr txBox="1"/>
-          <p:nvPr/>
-        </p:nvSpPr>
-        <p:spPr>
-          <a:xfrm>
-            <a:off x="1655064" y="3611880"/>
-            <a:ext cx="1078992" cy="566928"/>
+          <p:cNvPr id="14" name="TextBox 13"/>
+          <p:cNvSpPr txBox="1"/>
+          <p:nvPr/>
+        </p:nvSpPr>
+        <p:spPr>
+          <a:xfrm>
+            <a:off x="1133856" y="3310128"/>
+            <a:ext cx="585216" cy="548640"/>
           </a:xfrm>
           <a:prstGeom prst="rect">
             <a:avLst/>
@@ -6423,7 +6474,7 @@
               </a:spcAft>
             </a:pPr>
             <a:r>
-              <a:rPr sz="1350" b="1">
+              <a:rPr sz="850" b="1">
                 <a:solidFill>
                   <a:srgbClr val="142634"/>
                 </a:solidFill>
@@ -6436,14 +6487,14 @@
       </p:sp>
       <p:sp>
         <p:nvSpPr>
-          <p:cNvPr id="14" name="Rectangle 13"/>
+          <p:cNvPr id="15" name="Rectangle 14"/>
           <p:cNvSpPr/>
           <p:nvPr/>
         </p:nvSpPr>
         <p:spPr>
           <a:xfrm>
-            <a:off x="2807208" y="3611880"/>
-            <a:ext cx="1078992" cy="566928"/>
+            <a:off x="1764792" y="3310128"/>
+            <a:ext cx="585216" cy="548640"/>
           </a:xfrm>
           <a:prstGeom prst="rect">
             <a:avLst/>
@@ -6480,14 +6531,14 @@
       </p:sp>
       <p:sp>
         <p:nvSpPr>
-          <p:cNvPr id="15" name="TextBox 14"/>
-          <p:cNvSpPr txBox="1"/>
-          <p:nvPr/>
-        </p:nvSpPr>
-        <p:spPr>
-          <a:xfrm>
-            <a:off x="2807208" y="3611880"/>
-            <a:ext cx="1078992" cy="566928"/>
+          <p:cNvPr id="16" name="TextBox 15"/>
+          <p:cNvSpPr txBox="1"/>
+          <p:nvPr/>
+        </p:nvSpPr>
+        <p:spPr>
+          <a:xfrm>
+            <a:off x="1764792" y="3310128"/>
+            <a:ext cx="585216" cy="548640"/>
           </a:xfrm>
           <a:prstGeom prst="rect">
             <a:avLst/>
@@ -6506,7 +6557,7 @@
               </a:spcAft>
             </a:pPr>
             <a:r>
-              <a:rPr sz="1350" b="1">
+              <a:rPr sz="850" b="1">
                 <a:solidFill>
                   <a:srgbClr val="142634"/>
                 </a:solidFill>
@@ -6519,14 +6570,14 @@
       </p:sp>
       <p:sp>
         <p:nvSpPr>
-          <p:cNvPr id="16" name="Rectangle 15"/>
+          <p:cNvPr id="17" name="Rectangle 16"/>
           <p:cNvSpPr/>
           <p:nvPr/>
         </p:nvSpPr>
         <p:spPr>
           <a:xfrm>
-            <a:off x="3959352" y="3611880"/>
-            <a:ext cx="1078992" cy="566928"/>
+            <a:off x="2395728" y="3310128"/>
+            <a:ext cx="585216" cy="548640"/>
           </a:xfrm>
           <a:prstGeom prst="rect">
             <a:avLst/>
@@ -6563,14 +6614,14 @@
       </p:sp>
       <p:sp>
         <p:nvSpPr>
-          <p:cNvPr id="17" name="TextBox 16"/>
-          <p:cNvSpPr txBox="1"/>
-          <p:nvPr/>
-        </p:nvSpPr>
-        <p:spPr>
-          <a:xfrm>
-            <a:off x="3959352" y="3611880"/>
-            <a:ext cx="1078992" cy="566928"/>
+          <p:cNvPr id="18" name="TextBox 17"/>
+          <p:cNvSpPr txBox="1"/>
+          <p:nvPr/>
+        </p:nvSpPr>
+        <p:spPr>
+          <a:xfrm>
+            <a:off x="2395728" y="3310128"/>
+            <a:ext cx="585216" cy="548640"/>
           </a:xfrm>
           <a:prstGeom prst="rect">
             <a:avLst/>
@@ -6589,7 +6640,7 @@
               </a:spcAft>
             </a:pPr>
             <a:r>
-              <a:rPr sz="1350" b="1">
+              <a:rPr sz="850" b="1">
                 <a:solidFill>
                   <a:srgbClr val="142634"/>
                 </a:solidFill>
@@ -6602,14 +6653,14 @@
       </p:sp>
       <p:sp>
         <p:nvSpPr>
-          <p:cNvPr id="18" name="Rectangle 17"/>
+          <p:cNvPr id="19" name="Rectangle 18"/>
           <p:cNvSpPr/>
           <p:nvPr/>
         </p:nvSpPr>
         <p:spPr>
           <a:xfrm>
-            <a:off x="5111496" y="3611880"/>
-            <a:ext cx="1078992" cy="566928"/>
+            <a:off x="3026664" y="3310128"/>
+            <a:ext cx="585216" cy="548640"/>
           </a:xfrm>
           <a:prstGeom prst="rect">
             <a:avLst/>
@@ -6646,14 +6697,14 @@
       </p:sp>
       <p:sp>
         <p:nvSpPr>
-          <p:cNvPr id="19" name="TextBox 18"/>
-          <p:cNvSpPr txBox="1"/>
-          <p:nvPr/>
-        </p:nvSpPr>
-        <p:spPr>
-          <a:xfrm>
-            <a:off x="5111496" y="3611880"/>
-            <a:ext cx="1078992" cy="566928"/>
+          <p:cNvPr id="20" name="TextBox 19"/>
+          <p:cNvSpPr txBox="1"/>
+          <p:nvPr/>
+        </p:nvSpPr>
+        <p:spPr>
+          <a:xfrm>
+            <a:off x="3026664" y="3310128"/>
+            <a:ext cx="585216" cy="548640"/>
           </a:xfrm>
           <a:prstGeom prst="rect">
             <a:avLst/>
@@ -6672,7 +6723,7 @@
               </a:spcAft>
             </a:pPr>
             <a:r>
-              <a:rPr sz="1350" b="1">
+              <a:rPr sz="850" b="1">
                 <a:solidFill>
                   <a:srgbClr val="142634"/>
                 </a:solidFill>
@@ -6685,14 +6736,14 @@
       </p:sp>
       <p:sp>
         <p:nvSpPr>
-          <p:cNvPr id="20" name="Rectangle 19"/>
+          <p:cNvPr id="21" name="Rectangle 20"/>
           <p:cNvSpPr/>
           <p:nvPr/>
         </p:nvSpPr>
         <p:spPr>
           <a:xfrm>
-            <a:off x="502920" y="4617720"/>
-            <a:ext cx="2560320" cy="566928"/>
+            <a:off x="502920" y="4160520"/>
+            <a:ext cx="2560320" cy="548640"/>
           </a:xfrm>
           <a:prstGeom prst="rect">
             <a:avLst/>
@@ -6731,14 +6782,14 @@
       </p:sp>
       <p:sp>
         <p:nvSpPr>
-          <p:cNvPr id="21" name="TextBox 20"/>
-          <p:cNvSpPr txBox="1"/>
-          <p:nvPr/>
-        </p:nvSpPr>
-        <p:spPr>
-          <a:xfrm>
-            <a:off x="502920" y="4617720"/>
-            <a:ext cx="2560320" cy="566928"/>
+          <p:cNvPr id="22" name="TextBox 21"/>
+          <p:cNvSpPr txBox="1"/>
+          <p:nvPr/>
+        </p:nvSpPr>
+        <p:spPr>
+          <a:xfrm>
+            <a:off x="502920" y="4160520"/>
+            <a:ext cx="2560320" cy="548640"/>
           </a:xfrm>
           <a:prstGeom prst="rect">
             <a:avLst/>
@@ -6770,14 +6821,14 @@
       </p:sp>
       <p:sp>
         <p:nvSpPr>
-          <p:cNvPr id="22" name="Down Arrow 21"/>
+          <p:cNvPr id="23" name="Down Arrow 22"/>
           <p:cNvSpPr/>
           <p:nvPr/>
         </p:nvSpPr>
         <p:spPr>
           <a:xfrm>
-            <a:off x="1645920" y="2148840"/>
-            <a:ext cx="182880" cy="292608"/>
+            <a:off x="1691640" y="2103120"/>
+            <a:ext cx="182880" cy="219456"/>
           </a:xfrm>
           <a:prstGeom prst="downArrow">
             <a:avLst/>
@@ -6814,14 +6865,14 @@
       </p:sp>
       <p:sp>
         <p:nvSpPr>
-          <p:cNvPr id="23" name="Down Arrow 22"/>
+          <p:cNvPr id="24" name="Down Arrow 23"/>
           <p:cNvSpPr/>
           <p:nvPr/>
         </p:nvSpPr>
         <p:spPr>
           <a:xfrm>
-            <a:off x="1645920" y="3246120"/>
-            <a:ext cx="182880" cy="292608"/>
+            <a:off x="1691640" y="2907792"/>
+            <a:ext cx="182880" cy="219456"/>
           </a:xfrm>
           <a:prstGeom prst="downArrow">
             <a:avLst/>
@@ -6858,14 +6909,14 @@
       </p:sp>
       <p:sp>
         <p:nvSpPr>
-          <p:cNvPr id="24" name="Down Arrow 23"/>
+          <p:cNvPr id="25" name="Down Arrow 24"/>
           <p:cNvSpPr/>
           <p:nvPr/>
         </p:nvSpPr>
         <p:spPr>
           <a:xfrm>
-            <a:off x="1645920" y="4251960"/>
-            <a:ext cx="182880" cy="292608"/>
+            <a:off x="1691640" y="3913632"/>
+            <a:ext cx="182880" cy="219456"/>
           </a:xfrm>
           <a:prstGeom prst="downArrow">
             <a:avLst/>
@@ -6902,7 +6953,7 @@
       </p:sp>
       <p:pic>
         <p:nvPicPr>
-          <p:cNvPr id="25" name="Picture 24" descr="image.jpg"/>
+          <p:cNvPr id="26" name="Picture 25" descr="image.jpg"/>
           <p:cNvPicPr>
             <a:picLocks noChangeAspect="1"/>
           </p:cNvPicPr>
@@ -6916,8 +6967,8 @@
         </p:blipFill>
         <p:spPr>
           <a:xfrm>
-            <a:off x="4206240" y="1554480"/>
-            <a:ext cx="3657600" cy="2377440"/>
+            <a:off x="4206240" y="1508760"/>
+            <a:ext cx="3703320" cy="2194560"/>
           </a:xfrm>
           <a:prstGeom prst="rect">
             <a:avLst/>
@@ -6926,14 +6977,14 @@
       </p:pic>
       <p:sp>
         <p:nvSpPr>
-          <p:cNvPr id="26" name="Rectangle 25"/>
+          <p:cNvPr id="27" name="Rectangle 26"/>
           <p:cNvSpPr/>
           <p:nvPr/>
         </p:nvSpPr>
         <p:spPr>
           <a:xfrm>
-            <a:off x="4206240" y="1554480"/>
-            <a:ext cx="3657600" cy="2377440"/>
+            <a:off x="4206240" y="1508760"/>
+            <a:ext cx="3703320" cy="2194560"/>
           </a:xfrm>
           <a:prstGeom prst="rect">
             <a:avLst/>
@@ -6970,14 +7021,14 @@
       </p:sp>
       <p:sp>
         <p:nvSpPr>
-          <p:cNvPr id="27" name="TextBox 26"/>
-          <p:cNvSpPr txBox="1"/>
-          <p:nvPr/>
-        </p:nvSpPr>
-        <p:spPr>
-          <a:xfrm>
-            <a:off x="4206240" y="3982720"/>
-            <a:ext cx="3657600" cy="274320"/>
+          <p:cNvPr id="28" name="TextBox 27"/>
+          <p:cNvSpPr txBox="1"/>
+          <p:nvPr/>
+        </p:nvSpPr>
+        <p:spPr>
+          <a:xfrm>
+            <a:off x="4206240" y="3754120"/>
+            <a:ext cx="3703320" cy="274320"/>
           </a:xfrm>
           <a:prstGeom prst="rect">
             <a:avLst/>
@@ -7009,7 +7060,7 @@
       </p:sp>
       <p:pic>
         <p:nvPicPr>
-          <p:cNvPr id="28" name="Picture 27" descr="image.jpg"/>
+          <p:cNvPr id="29" name="Picture 28" descr="image.jpg"/>
           <p:cNvPicPr>
             <a:picLocks noChangeAspect="1"/>
           </p:cNvPicPr>
@@ -7023,8 +7074,8 @@
         </p:blipFill>
         <p:spPr>
           <a:xfrm>
-            <a:off x="8183879" y="1554480"/>
-            <a:ext cx="3502152" cy="2377440"/>
+            <a:off x="8092440" y="1508760"/>
+            <a:ext cx="3593592" cy="2194560"/>
           </a:xfrm>
           <a:prstGeom prst="rect">
             <a:avLst/>
@@ -7033,14 +7084,14 @@
       </p:pic>
       <p:sp>
         <p:nvSpPr>
-          <p:cNvPr id="29" name="Rectangle 28"/>
+          <p:cNvPr id="30" name="Rectangle 29"/>
           <p:cNvSpPr/>
           <p:nvPr/>
         </p:nvSpPr>
         <p:spPr>
           <a:xfrm>
-            <a:off x="8183879" y="1554480"/>
-            <a:ext cx="3502152" cy="2377440"/>
+            <a:off x="8092440" y="1508760"/>
+            <a:ext cx="3593592" cy="2194560"/>
           </a:xfrm>
           <a:prstGeom prst="rect">
             <a:avLst/>
@@ -7077,14 +7128,14 @@
       </p:sp>
       <p:sp>
         <p:nvSpPr>
-          <p:cNvPr id="30" name="TextBox 29"/>
-          <p:cNvSpPr txBox="1"/>
-          <p:nvPr/>
-        </p:nvSpPr>
-        <p:spPr>
-          <a:xfrm>
-            <a:off x="8183879" y="3982720"/>
-            <a:ext cx="3502152" cy="274320"/>
+          <p:cNvPr id="31" name="TextBox 30"/>
+          <p:cNvSpPr txBox="1"/>
+          <p:nvPr/>
+        </p:nvSpPr>
+        <p:spPr>
+          <a:xfrm>
+            <a:off x="8092440" y="3754120"/>
+            <a:ext cx="3593592" cy="274320"/>
           </a:xfrm>
           <a:prstGeom prst="rect">
             <a:avLst/>
@@ -7116,14 +7167,14 @@
       </p:sp>
       <p:sp>
         <p:nvSpPr>
-          <p:cNvPr id="31" name="Rectangle 30"/>
+          <p:cNvPr id="32" name="Rectangle 31"/>
           <p:cNvSpPr/>
           <p:nvPr/>
         </p:nvSpPr>
         <p:spPr>
           <a:xfrm>
-            <a:off x="4206240" y="4709160"/>
-            <a:ext cx="7479792" cy="1371600"/>
+            <a:off x="4206240" y="4434840"/>
+            <a:ext cx="7479792" cy="1417320"/>
           </a:xfrm>
           <a:prstGeom prst="rect">
             <a:avLst/>
@@ -7162,13 +7213,13 @@
       </p:sp>
       <p:sp>
         <p:nvSpPr>
-          <p:cNvPr id="32" name="TextBox 31"/>
-          <p:cNvSpPr txBox="1"/>
-          <p:nvPr/>
-        </p:nvSpPr>
-        <p:spPr>
-          <a:xfrm>
-            <a:off x="4526280" y="4892040"/>
+          <p:cNvPr id="33" name="TextBox 32"/>
+          <p:cNvSpPr txBox="1"/>
+          <p:nvPr/>
+        </p:nvSpPr>
+        <p:spPr>
+          <a:xfrm>
+            <a:off x="4526280" y="4617720"/>
             <a:ext cx="6858000" cy="457200"/>
           </a:xfrm>
           <a:prstGeom prst="rect">
@@ -7201,14 +7252,14 @@
       </p:sp>
       <p:sp>
         <p:nvSpPr>
-          <p:cNvPr id="33" name="TextBox 32"/>
-          <p:cNvSpPr txBox="1"/>
-          <p:nvPr/>
-        </p:nvSpPr>
-        <p:spPr>
-          <a:xfrm>
-            <a:off x="4526280" y="5440680"/>
-            <a:ext cx="6858000" cy="502920"/>
+          <p:cNvPr id="34" name="TextBox 33"/>
+          <p:cNvSpPr txBox="1"/>
+          <p:nvPr/>
+        </p:nvSpPr>
+        <p:spPr>
+          <a:xfrm>
+            <a:off x="4526280" y="5166360"/>
+            <a:ext cx="6858000" cy="548640"/>
           </a:xfrm>
           <a:prstGeom prst="rect">
             <a:avLst/>
@@ -7240,7 +7291,7 @@
       </p:sp>
       <p:sp>
         <p:nvSpPr>
-          <p:cNvPr id="34" name="Rectangle 33"/>
+          <p:cNvPr id="35" name="Rectangle 34"/>
           <p:cNvSpPr/>
           <p:nvPr/>
         </p:nvSpPr>
@@ -7284,7 +7335,7 @@
       </p:sp>
       <p:sp>
         <p:nvSpPr>
-          <p:cNvPr id="35" name="TextBox 34"/>
+          <p:cNvPr id="36" name="TextBox 35"/>
           <p:cNvSpPr txBox="1"/>
           <p:nvPr/>
         </p:nvSpPr>
@@ -7323,7 +7374,7 @@
       </p:sp>
       <p:sp>
         <p:nvSpPr>
-          <p:cNvPr id="36" name="TextBox 35"/>
+          <p:cNvPr id="37" name="TextBox 36"/>
           <p:cNvSpPr txBox="1"/>
           <p:nvPr/>
         </p:nvSpPr>
@@ -7365,6 +7416,9 @@
   <p:clrMapOvr>
     <a:masterClrMapping/>
   </p:clrMapOvr>
+  <p:transition spd="med">
+    <p:push dir="l"/>
+  </p:transition>
 </p:sld>
 </file>
 
@@ -8298,6 +8352,9 @@
   <p:clrMapOvr>
     <a:masterClrMapping/>
   </p:clrMapOvr>
+  <p:transition spd="med">
+    <p:push dir="l"/>
+  </p:transition>
 </p:sld>
 </file>
 
@@ -9585,6 +9642,9 @@
   <p:clrMapOvr>
     <a:masterClrMapping/>
   </p:clrMapOvr>
+  <p:transition spd="med">
+    <p:push dir="l"/>
+  </p:transition>
 </p:sld>
 </file>
 
@@ -10123,6 +10183,9 @@
   <p:clrMapOvr>
     <a:masterClrMapping/>
   </p:clrMapOvr>
+  <p:transition spd="med">
+    <p:push dir="l"/>
+  </p:transition>
 </p:sld>
 </file>
 
@@ -10843,6 +10906,9 @@
   <p:clrMapOvr>
     <a:masterClrMapping/>
   </p:clrMapOvr>
+  <p:transition spd="med">
+    <p:push dir="l"/>
+  </p:transition>
 </p:sld>
 </file>
 
@@ -11967,6 +12033,9 @@
   <p:clrMapOvr>
     <a:masterClrMapping/>
   </p:clrMapOvr>
+  <p:transition spd="med">
+    <p:push dir="l"/>
+  </p:transition>
 </p:sld>
 </file>
 

--- a/public/assets/wuzhen_waterways_presentation.pptx
+++ b/public/assets/wuzhen_waterways_presentation.pptx
@@ -10,6 +10,7 @@
     <p:sldId id="258" r:id="rId9"/>
     <p:sldId id="259" r:id="rId10"/>
     <p:sldId id="260" r:id="rId11"/>
+    <p:sldId id="261" r:id="rId12"/>
   </p:sldIdLst>
   <p:sldSz cx="12192000" cy="6858000" type="screen4x3"/>
   <p:notesSz cx="6858000" cy="9144000"/>
@@ -786,7 +787,77 @@
           <a:lstStyle/>
           <a:p>
             <a:r>
-              <a:t>Slide 5 · ~60 s. Introduce the six of us, one line each, following the avatar numbers 01 to 06. End on 'Water connects everything.' and hold the closing question: 'Why is water the main line of Wuzhen?' Then thank the class.</a:t>
+              <a:t>Slide 5 · ~60 s. Introduce the six of us, one line each, following the avatar numbers 01 to 06 above the group photo.</a:t>
+            </a:r>
+          </a:p>
+        </p:txBody>
+      </p:sp>
+      <p:sp>
+        <p:nvSpPr>
+          <p:cNvPr id="4" name="Slide Number Placeholder 3"/>
+          <p:cNvSpPr>
+            <a:spLocks noGrp="1"/>
+          </p:cNvSpPr>
+          <p:nvPr>
+            <p:ph type="sldNum" idx="5" sz="quarter"/>
+          </p:nvPr>
+        </p:nvSpPr>
+        <p:spPr/>
+      </p:sp>
+    </p:spTree>
+  </p:cSld>
+  <p:clrMapOvr>
+    <a:masterClrMapping/>
+  </p:clrMapOvr>
+</p:notes>
+</file>
+
+<file path=ppt/notesSlides/notesSlide6.xml><?xml version="1.0" encoding="utf-8"?>
+<p:notes xmlns:a="http://schemas.openxmlformats.org/drawingml/2006/main" xmlns:p="http://schemas.openxmlformats.org/presentationml/2006/main" xmlns:r="http://schemas.openxmlformats.org/officeDocument/2006/relationships">
+  <p:cSld>
+    <p:spTree>
+      <p:nvGrpSpPr>
+        <p:cNvPr id="1" name=""/>
+        <p:cNvGrpSpPr/>
+        <p:nvPr/>
+      </p:nvGrpSpPr>
+      <p:grpSpPr>
+        <a:xfrm>
+          <a:off x="0" y="0"/>
+          <a:ext cx="0" cy="0"/>
+          <a:chOff x="0" y="0"/>
+          <a:chExt cx="0" cy="0"/>
+        </a:xfrm>
+      </p:grpSpPr>
+      <p:sp>
+        <p:nvSpPr>
+          <p:cNvPr id="2" name="Slide Image Placeholder 1"/>
+          <p:cNvSpPr>
+            <a:spLocks noGrp="1"/>
+          </p:cNvSpPr>
+          <p:nvPr>
+            <p:ph type="sldImg" idx="2"/>
+          </p:nvPr>
+        </p:nvSpPr>
+        <p:spPr/>
+      </p:sp>
+      <p:sp>
+        <p:nvSpPr>
+          <p:cNvPr id="3" name="Notes Placeholder 2"/>
+          <p:cNvSpPr>
+            <a:spLocks noGrp="1"/>
+          </p:cNvSpPr>
+          <p:nvPr>
+            <p:ph type="body" idx="3" sz="quarter"/>
+          </p:nvPr>
+        </p:nvSpPr>
+        <p:spPr/>
+        <p:txBody>
+          <a:bodyPr/>
+          <a:lstStyle/>
+          <a:p>
+            <a:r>
+              <a:t>Slide 6 · ~30 s. End on 'Water connects everything.' and hold the closing question: 'Why is water the main line of Wuzhen?' Then thank the class. Sources are listed at the bottom.</a:t>
             </a:r>
           </a:p>
         </p:txBody>
@@ -3812,8 +3883,8 @@
         </p:blipFill>
         <p:spPr>
           <a:xfrm>
-            <a:off x="-200000" y="-150000"/>
-            <a:ext cx="12592000" cy="7158000"/>
+            <a:off x="0" y="0"/>
+            <a:ext cx="12192000" cy="6858000"/>
           </a:xfrm>
           <a:prstGeom prst="rect">
             <a:avLst/>
@@ -4258,8 +4329,8 @@
         </p:nvSpPr>
         <p:spPr>
           <a:xfrm>
-            <a:off x="9692640" y="6510528"/>
-            <a:ext cx="1947672" cy="256032"/>
+            <a:off x="9326880" y="457200"/>
+            <a:ext cx="2679192" cy="256032"/>
           </a:xfrm>
           <a:prstGeom prst="rect">
             <a:avLst/>
@@ -4278,7 +4349,7 @@
               </a:spcAft>
             </a:pPr>
             <a:r>
-              <a:rPr sz="800" b="0" spc="200">
+              <a:rPr sz="700" b="0" spc="200">
                 <a:solidFill>
                   <a:srgbClr val="8C9BA9"/>
                 </a:solidFill>
@@ -4516,7 +4587,7 @@
         <p:spPr>
           <a:xfrm>
             <a:off x="548640" y="841248"/>
-            <a:ext cx="2218334" cy="0"/>
+            <a:ext cx="1848612" cy="0"/>
           </a:xfrm>
           <a:prstGeom prst="line">
             <a:avLst/>
@@ -4551,8 +4622,8 @@
         </p:nvSpPr>
         <p:spPr>
           <a:xfrm>
-            <a:off x="9692640" y="6510528"/>
-            <a:ext cx="1947672" cy="256032"/>
+            <a:off x="9326880" y="457200"/>
+            <a:ext cx="2679192" cy="256032"/>
           </a:xfrm>
           <a:prstGeom prst="rect">
             <a:avLst/>
@@ -4571,7 +4642,7 @@
               </a:spcAft>
             </a:pPr>
             <a:r>
-              <a:rPr sz="800" b="0" spc="200">
+              <a:rPr sz="700" b="0" spc="200">
                 <a:solidFill>
                   <a:srgbClr val="8C9BA9"/>
                 </a:solidFill>
@@ -4724,7 +4795,7 @@
               </a:spcAft>
             </a:pPr>
             <a:r>
-              <a:rPr sz="4200" b="1">
+              <a:rPr sz="3600" b="1">
                 <a:solidFill>
                   <a:srgbClr val="D9A85B"/>
                 </a:solidFill>
@@ -4877,7 +4948,7 @@
               </a:spcAft>
             </a:pPr>
             <a:r>
-              <a:rPr sz="4200" b="1">
+              <a:rPr sz="3600" b="1">
                 <a:solidFill>
                   <a:srgbClr val="D9A85B"/>
                 </a:solidFill>
@@ -5030,7 +5101,7 @@
               </a:spcAft>
             </a:pPr>
             <a:r>
-              <a:rPr sz="4200" b="1">
+              <a:rPr sz="3600" b="1">
                 <a:solidFill>
                   <a:srgbClr val="D9A85B"/>
                 </a:solidFill>
@@ -5135,8 +5206,8 @@
         </p:blipFill>
         <p:spPr>
           <a:xfrm>
-            <a:off x="5120640" y="2011680"/>
-            <a:ext cx="6519672" cy="4206240"/>
+            <a:off x="5789676" y="2331720"/>
+            <a:ext cx="5181599" cy="3886200"/>
           </a:xfrm>
           <a:prstGeom prst="rect">
             <a:avLst/>
@@ -5151,8 +5222,8 @@
         </p:nvSpPr>
         <p:spPr>
           <a:xfrm>
-            <a:off x="5120640" y="2011680"/>
-            <a:ext cx="6519672" cy="4206240"/>
+            <a:off x="5120640" y="2331720"/>
+            <a:ext cx="6519672" cy="3886200"/>
           </a:xfrm>
           <a:prstGeom prst="rect">
             <a:avLst/>
@@ -5453,7 +5524,7 @@
         <p:spPr>
           <a:xfrm>
             <a:off x="548640" y="841248"/>
-            <a:ext cx="4436668" cy="0"/>
+            <a:ext cx="3697223" cy="0"/>
           </a:xfrm>
           <a:prstGeom prst="line">
             <a:avLst/>
@@ -5488,8 +5559,8 @@
         </p:nvSpPr>
         <p:spPr>
           <a:xfrm>
-            <a:off x="9692640" y="6510528"/>
-            <a:ext cx="1947672" cy="256032"/>
+            <a:off x="9326880" y="457200"/>
+            <a:ext cx="2679192" cy="256032"/>
           </a:xfrm>
           <a:prstGeom prst="rect">
             <a:avLst/>
@@ -5508,7 +5579,7 @@
               </a:spcAft>
             </a:pPr>
             <a:r>
-              <a:rPr sz="800" b="0" spc="200">
+              <a:rPr sz="700" b="0" spc="200">
                 <a:solidFill>
                   <a:srgbClr val="8C9BA9"/>
                 </a:solidFill>
@@ -6337,73 +6408,6 @@
                 <a:latin typeface="Arial"/>
               </a:rPr>
               <a:t>·</a:t>
-            </a:r>
-          </a:p>
-        </p:txBody>
-      </p:sp>
-      <p:pic>
-        <p:nvPicPr>
-          <p:cNvPr id="29" name="Picture 28" descr="image.jpg"/>
-          <p:cNvPicPr>
-            <a:picLocks noChangeAspect="1"/>
-          </p:cNvPicPr>
-          <p:nvPr/>
-        </p:nvPicPr>
-        <p:blipFill>
-          <a:blip r:embed="rId2">
-            <a:alphaModFix>
-              <a:alpha val="80000"/>
-            </a:alphaModFix>
-          </a:blip>
-          <a:stretch>
-            <a:fillRect/>
-          </a:stretch>
-        </p:blipFill>
-        <p:spPr>
-          <a:xfrm>
-            <a:off x="8503920" y="1371600"/>
-            <a:ext cx="3136392" cy="1828800"/>
-          </a:xfrm>
-          <a:prstGeom prst="rect">
-            <a:avLst/>
-          </a:prstGeom>
-        </p:spPr>
-      </p:pic>
-      <p:sp>
-        <p:nvSpPr>
-          <p:cNvPr id="30" name="TextBox 29"/>
-          <p:cNvSpPr txBox="1"/>
-          <p:nvPr/>
-        </p:nvSpPr>
-        <p:spPr>
-          <a:xfrm>
-            <a:off x="7863840" y="6510528"/>
-            <a:ext cx="3776472" cy="256032"/>
-          </a:xfrm>
-          <a:prstGeom prst="rect">
-            <a:avLst/>
-          </a:prstGeom>
-          <a:noFill/>
-        </p:spPr>
-        <p:txBody>
-          <a:bodyPr wrap="square" anchor="t" lIns="0" rIns="0" tIns="0" bIns="0">
-            <a:spAutoFit/>
-          </a:bodyPr>
-          <a:lstStyle/>
-          <a:p>
-            <a:pPr algn="r">
-              <a:spcAft>
-                <a:spcPts val="0"/>
-              </a:spcAft>
-            </a:pPr>
-            <a:r>
-              <a:rPr sz="750" b="0">
-                <a:solidFill>
-                  <a:srgbClr val="8C9BA9"/>
-                </a:solidFill>
-                <a:latin typeface="Arial"/>
-              </a:rPr>
-              <a:t>Photo: Immanuel Giel · CC BY-SA 4.0</a:t>
             </a:r>
           </a:p>
         </p:txBody>
@@ -6596,7 +6600,7 @@
         <p:spPr>
           <a:xfrm>
             <a:off x="548640" y="841248"/>
-            <a:ext cx="6655003" cy="0"/>
+            <a:ext cx="5545836" cy="0"/>
           </a:xfrm>
           <a:prstGeom prst="line">
             <a:avLst/>
@@ -6631,8 +6635,8 @@
         </p:nvSpPr>
         <p:spPr>
           <a:xfrm>
-            <a:off x="9692640" y="6510528"/>
-            <a:ext cx="1947672" cy="256032"/>
+            <a:off x="9326880" y="457200"/>
+            <a:ext cx="2679192" cy="256032"/>
           </a:xfrm>
           <a:prstGeom prst="rect">
             <a:avLst/>
@@ -6651,7 +6655,7 @@
               </a:spcAft>
             </a:pPr>
             <a:r>
-              <a:rPr sz="800" b="0" spc="200">
+              <a:rPr sz="700" b="0" spc="200">
                 <a:solidFill>
                   <a:srgbClr val="8C9BA9"/>
                 </a:solidFill>
@@ -6717,8 +6721,8 @@
         </p:blipFill>
         <p:spPr>
           <a:xfrm>
-            <a:off x="640080" y="2468880"/>
-            <a:ext cx="4206240" cy="3383280"/>
+            <a:off x="640080" y="2761945"/>
+            <a:ext cx="4206240" cy="2797149"/>
           </a:xfrm>
           <a:prstGeom prst="rect">
             <a:avLst/>
@@ -7122,52 +7126,13 @@
       </p:sp>
       <p:sp>
         <p:nvSpPr>
-          <p:cNvPr id="20" name="TextBox 19"/>
-          <p:cNvSpPr txBox="1"/>
-          <p:nvPr/>
-        </p:nvSpPr>
-        <p:spPr>
-          <a:xfrm>
-            <a:off x="5212080" y="6025896"/>
-            <a:ext cx="2743200" cy="365760"/>
-          </a:xfrm>
-          <a:prstGeom prst="rect">
-            <a:avLst/>
-          </a:prstGeom>
-          <a:noFill/>
-        </p:spPr>
-        <p:txBody>
-          <a:bodyPr wrap="square" anchor="t" lIns="0" rIns="0" tIns="0" bIns="0">
-            <a:spAutoFit/>
-          </a:bodyPr>
-          <a:lstStyle/>
-          <a:p>
-            <a:pPr algn="l">
-              <a:spcAft>
-                <a:spcPts val="0"/>
-              </a:spcAft>
-            </a:pPr>
-            <a:r>
-              <a:rPr sz="1100" b="1">
-                <a:solidFill>
-                  <a:srgbClr val="D9A85B"/>
-                </a:solidFill>
-                <a:latin typeface="Arial"/>
-              </a:rPr>
-              <a:t>≈ 72 words</a:t>
-            </a:r>
-          </a:p>
-        </p:txBody>
-      </p:sp>
-      <p:sp>
-        <p:nvSpPr>
-          <p:cNvPr id="21" name="Rounded Rectangle 20"/>
+          <p:cNvPr id="20" name="Rounded Rectangle 19"/>
           <p:cNvSpPr/>
           <p:nvPr/>
         </p:nvSpPr>
         <p:spPr>
           <a:xfrm>
-            <a:off x="5212080" y="6080760"/>
+            <a:off x="5212080" y="5943600"/>
             <a:ext cx="1207008" cy="438912"/>
           </a:xfrm>
           <a:prstGeom prst="roundRect">
@@ -7209,13 +7174,13 @@
       </p:sp>
       <p:sp>
         <p:nvSpPr>
-          <p:cNvPr id="22" name="TextBox 21"/>
+          <p:cNvPr id="21" name="TextBox 20"/>
           <p:cNvSpPr txBox="1"/>
           <p:nvPr/>
         </p:nvSpPr>
         <p:spPr>
           <a:xfrm>
-            <a:off x="5212080" y="6080760"/>
+            <a:off x="5212080" y="5943600"/>
             <a:ext cx="1207008" cy="438912"/>
           </a:xfrm>
           <a:prstGeom prst="rect">
@@ -7248,13 +7213,13 @@
       </p:sp>
       <p:sp>
         <p:nvSpPr>
-          <p:cNvPr id="23" name="Rounded Rectangle 22"/>
+          <p:cNvPr id="22" name="Rounded Rectangle 21"/>
           <p:cNvSpPr/>
           <p:nvPr/>
         </p:nvSpPr>
         <p:spPr>
           <a:xfrm>
-            <a:off x="6528816" y="6080760"/>
+            <a:off x="6528816" y="5943600"/>
             <a:ext cx="1207008" cy="438912"/>
           </a:xfrm>
           <a:prstGeom prst="roundRect">
@@ -7296,13 +7261,13 @@
       </p:sp>
       <p:sp>
         <p:nvSpPr>
-          <p:cNvPr id="24" name="TextBox 23"/>
+          <p:cNvPr id="23" name="TextBox 22"/>
           <p:cNvSpPr txBox="1"/>
           <p:nvPr/>
         </p:nvSpPr>
         <p:spPr>
           <a:xfrm>
-            <a:off x="6528816" y="6080760"/>
+            <a:off x="6528816" y="5943600"/>
             <a:ext cx="1207008" cy="438912"/>
           </a:xfrm>
           <a:prstGeom prst="rect">
@@ -7335,13 +7300,13 @@
       </p:sp>
       <p:sp>
         <p:nvSpPr>
-          <p:cNvPr id="25" name="Rounded Rectangle 24"/>
+          <p:cNvPr id="24" name="Rounded Rectangle 23"/>
           <p:cNvSpPr/>
           <p:nvPr/>
         </p:nvSpPr>
         <p:spPr>
           <a:xfrm>
-            <a:off x="7845552" y="6080760"/>
+            <a:off x="7845552" y="5943600"/>
             <a:ext cx="1207008" cy="438912"/>
           </a:xfrm>
           <a:prstGeom prst="roundRect">
@@ -7383,13 +7348,13 @@
       </p:sp>
       <p:sp>
         <p:nvSpPr>
-          <p:cNvPr id="26" name="TextBox 25"/>
+          <p:cNvPr id="25" name="TextBox 24"/>
           <p:cNvSpPr txBox="1"/>
           <p:nvPr/>
         </p:nvSpPr>
         <p:spPr>
           <a:xfrm>
-            <a:off x="7845552" y="6080760"/>
+            <a:off x="7845552" y="5943600"/>
             <a:ext cx="1207008" cy="438912"/>
           </a:xfrm>
           <a:prstGeom prst="rect">
@@ -7422,13 +7387,13 @@
       </p:sp>
       <p:sp>
         <p:nvSpPr>
-          <p:cNvPr id="27" name="Rounded Rectangle 26"/>
+          <p:cNvPr id="26" name="Rounded Rectangle 25"/>
           <p:cNvSpPr/>
           <p:nvPr/>
         </p:nvSpPr>
         <p:spPr>
           <a:xfrm>
-            <a:off x="9162288" y="6080760"/>
+            <a:off x="9162288" y="5943600"/>
             <a:ext cx="1207008" cy="438912"/>
           </a:xfrm>
           <a:prstGeom prst="roundRect">
@@ -7470,13 +7435,13 @@
       </p:sp>
       <p:sp>
         <p:nvSpPr>
-          <p:cNvPr id="28" name="TextBox 27"/>
+          <p:cNvPr id="27" name="TextBox 26"/>
           <p:cNvSpPr txBox="1"/>
           <p:nvPr/>
         </p:nvSpPr>
         <p:spPr>
           <a:xfrm>
-            <a:off x="9162288" y="6080760"/>
+            <a:off x="9162288" y="5943600"/>
             <a:ext cx="1207008" cy="438912"/>
           </a:xfrm>
           <a:prstGeom prst="rect">
@@ -7509,13 +7474,13 @@
       </p:sp>
       <p:sp>
         <p:nvSpPr>
-          <p:cNvPr id="29" name="Rounded Rectangle 28"/>
+          <p:cNvPr id="28" name="Rounded Rectangle 27"/>
           <p:cNvSpPr/>
           <p:nvPr/>
         </p:nvSpPr>
         <p:spPr>
           <a:xfrm>
-            <a:off x="10479024" y="6080760"/>
+            <a:off x="10479024" y="5943600"/>
             <a:ext cx="1207008" cy="438912"/>
           </a:xfrm>
           <a:prstGeom prst="roundRect">
@@ -7557,13 +7522,13 @@
       </p:sp>
       <p:sp>
         <p:nvSpPr>
-          <p:cNvPr id="30" name="TextBox 29"/>
+          <p:cNvPr id="29" name="TextBox 28"/>
           <p:cNvSpPr txBox="1"/>
           <p:nvPr/>
         </p:nvSpPr>
         <p:spPr>
           <a:xfrm>
-            <a:off x="10479024" y="6080760"/>
+            <a:off x="10479024" y="5943600"/>
             <a:ext cx="1207008" cy="438912"/>
           </a:xfrm>
           <a:prstGeom prst="rect">
@@ -7590,6 +7555,45 @@
                 <a:latin typeface="Arial"/>
               </a:rPr>
               <a:t>05 / NIGHT</a:t>
+            </a:r>
+          </a:p>
+        </p:txBody>
+      </p:sp>
+      <p:sp>
+        <p:nvSpPr>
+          <p:cNvPr id="30" name="TextBox 29"/>
+          <p:cNvSpPr txBox="1"/>
+          <p:nvPr/>
+        </p:nvSpPr>
+        <p:spPr>
+          <a:xfrm>
+            <a:off x="5212080" y="6510528"/>
+            <a:ext cx="2743200" cy="256032"/>
+          </a:xfrm>
+          <a:prstGeom prst="rect">
+            <a:avLst/>
+          </a:prstGeom>
+          <a:noFill/>
+        </p:spPr>
+        <p:txBody>
+          <a:bodyPr wrap="square" anchor="t" lIns="0" rIns="0" tIns="0" bIns="0">
+            <a:spAutoFit/>
+          </a:bodyPr>
+          <a:lstStyle/>
+          <a:p>
+            <a:pPr algn="l">
+              <a:spcAft>
+                <a:spcPts val="0"/>
+              </a:spcAft>
+            </a:pPr>
+            <a:r>
+              <a:rPr sz="1100" b="1">
+                <a:solidFill>
+                  <a:srgbClr val="D9A85B"/>
+                </a:solidFill>
+                <a:latin typeface="Arial"/>
+              </a:rPr>
+              <a:t>≈ 72 words</a:t>
             </a:r>
           </a:p>
         </p:txBody>
@@ -7821,7 +7825,7 @@
         <p:spPr>
           <a:xfrm>
             <a:off x="548640" y="841248"/>
-            <a:ext cx="8873337" cy="0"/>
+            <a:ext cx="7394447" cy="0"/>
           </a:xfrm>
           <a:prstGeom prst="line">
             <a:avLst/>
@@ -7856,8 +7860,8 @@
         </p:nvSpPr>
         <p:spPr>
           <a:xfrm>
-            <a:off x="9692640" y="6510528"/>
-            <a:ext cx="1947672" cy="256032"/>
+            <a:off x="9326880" y="457200"/>
+            <a:ext cx="2679192" cy="256032"/>
           </a:xfrm>
           <a:prstGeom prst="rect">
             <a:avLst/>
@@ -7876,7 +7880,7 @@
               </a:spcAft>
             </a:pPr>
             <a:r>
-              <a:rPr sz="800" b="0" spc="200">
+              <a:rPr sz="700" b="0" spc="200">
                 <a:solidFill>
                   <a:srgbClr val="8C9BA9"/>
                 </a:solidFill>
@@ -7895,8 +7899,8 @@
         </p:nvSpPr>
         <p:spPr>
           <a:xfrm>
-            <a:off x="640080" y="1188720"/>
-            <a:ext cx="10058400" cy="640080"/>
+            <a:off x="640080" y="1051560"/>
+            <a:ext cx="10881360" cy="548640"/>
           </a:xfrm>
           <a:prstGeom prst="rect">
             <a:avLst/>
@@ -7942,8 +7946,8 @@
         </p:blipFill>
         <p:spPr>
           <a:xfrm>
-            <a:off x="640080" y="1874519"/>
-            <a:ext cx="10908792" cy="2103120"/>
+            <a:off x="1979676" y="1481328"/>
+            <a:ext cx="8229600" cy="4114800"/>
           </a:xfrm>
           <a:prstGeom prst="rect">
             <a:avLst/>
@@ -7958,8 +7962,8 @@
         </p:nvSpPr>
         <p:spPr>
           <a:xfrm>
-            <a:off x="640080" y="1874519"/>
-            <a:ext cx="10908792" cy="2103120"/>
+            <a:off x="1979676" y="1481328"/>
+            <a:ext cx="8229600" cy="4114800"/>
           </a:xfrm>
           <a:prstGeom prst="rect">
             <a:avLst/>
@@ -8010,8 +8014,8 @@
         </p:blipFill>
         <p:spPr>
           <a:xfrm>
-            <a:off x="640080" y="4114800"/>
-            <a:ext cx="1371600" cy="1371600"/>
+            <a:off x="1979676" y="5687568"/>
+            <a:ext cx="914400" cy="914400"/>
           </a:xfrm>
           <a:prstGeom prst="rect">
             <a:avLst/>
@@ -8026,8 +8030,8 @@
         </p:nvSpPr>
         <p:spPr>
           <a:xfrm>
-            <a:off x="640080" y="4114800"/>
-            <a:ext cx="1371600" cy="1371600"/>
+            <a:off x="1979676" y="5687568"/>
+            <a:ext cx="914400" cy="914400"/>
           </a:xfrm>
           <a:prstGeom prst="rect">
             <a:avLst/>
@@ -8070,8 +8074,8 @@
         </p:nvSpPr>
         <p:spPr>
           <a:xfrm>
-            <a:off x="640080" y="5541264"/>
-            <a:ext cx="1371600" cy="274320"/>
+            <a:off x="1979676" y="6629400"/>
+            <a:ext cx="914400" cy="228600"/>
           </a:xfrm>
           <a:prstGeom prst="rect">
             <a:avLst/>
@@ -8090,13 +8094,13 @@
               </a:spcAft>
             </a:pPr>
             <a:r>
-              <a:rPr sz="800" b="1" spc="100">
+              <a:rPr sz="1000" b="1">
                 <a:solidFill>
                   <a:srgbClr val="8C9BA9"/>
                 </a:solidFill>
                 <a:latin typeface="Arial"/>
               </a:rPr>
-              <a:t>01  JIANG SHENGYI</a:t>
+              <a:t>01  蒋盛熠</a:t>
             </a:r>
           </a:p>
         </p:txBody>
@@ -8117,8 +8121,8 @@
         </p:blipFill>
         <p:spPr>
           <a:xfrm>
-            <a:off x="2487168" y="4114800"/>
-            <a:ext cx="1371600" cy="1371600"/>
+            <a:off x="3442716" y="5687568"/>
+            <a:ext cx="914400" cy="914400"/>
           </a:xfrm>
           <a:prstGeom prst="rect">
             <a:avLst/>
@@ -8133,8 +8137,8 @@
         </p:nvSpPr>
         <p:spPr>
           <a:xfrm>
-            <a:off x="2487168" y="4114800"/>
-            <a:ext cx="1371600" cy="1371600"/>
+            <a:off x="3442716" y="5687568"/>
+            <a:ext cx="914400" cy="914400"/>
           </a:xfrm>
           <a:prstGeom prst="rect">
             <a:avLst/>
@@ -8177,8 +8181,8 @@
         </p:nvSpPr>
         <p:spPr>
           <a:xfrm>
-            <a:off x="2487168" y="5541264"/>
-            <a:ext cx="1371600" cy="274320"/>
+            <a:off x="3442716" y="6629400"/>
+            <a:ext cx="914400" cy="228600"/>
           </a:xfrm>
           <a:prstGeom prst="rect">
             <a:avLst/>
@@ -8197,13 +8201,13 @@
               </a:spcAft>
             </a:pPr>
             <a:r>
-              <a:rPr sz="800" b="1" spc="100">
+              <a:rPr sz="1000" b="1">
                 <a:solidFill>
                   <a:srgbClr val="8C9BA9"/>
                 </a:solidFill>
                 <a:latin typeface="Arial"/>
               </a:rPr>
-              <a:t>02  WANG HANYU</a:t>
+              <a:t>02  汪瀚宇</a:t>
             </a:r>
           </a:p>
         </p:txBody>
@@ -8224,8 +8228,8 @@
         </p:blipFill>
         <p:spPr>
           <a:xfrm>
-            <a:off x="4334256" y="4114800"/>
-            <a:ext cx="1371600" cy="1371600"/>
+            <a:off x="4905756" y="5687568"/>
+            <a:ext cx="914400" cy="914400"/>
           </a:xfrm>
           <a:prstGeom prst="rect">
             <a:avLst/>
@@ -8240,8 +8244,8 @@
         </p:nvSpPr>
         <p:spPr>
           <a:xfrm>
-            <a:off x="4334256" y="4114800"/>
-            <a:ext cx="1371600" cy="1371600"/>
+            <a:off x="4905756" y="5687568"/>
+            <a:ext cx="914400" cy="914400"/>
           </a:xfrm>
           <a:prstGeom prst="rect">
             <a:avLst/>
@@ -8284,8 +8288,8 @@
         </p:nvSpPr>
         <p:spPr>
           <a:xfrm>
-            <a:off x="4334256" y="5541264"/>
-            <a:ext cx="1371600" cy="274320"/>
+            <a:off x="4905756" y="6629400"/>
+            <a:ext cx="914400" cy="228600"/>
           </a:xfrm>
           <a:prstGeom prst="rect">
             <a:avLst/>
@@ -8304,13 +8308,13 @@
               </a:spcAft>
             </a:pPr>
             <a:r>
-              <a:rPr sz="800" b="1" spc="100">
+              <a:rPr sz="1000" b="1">
                 <a:solidFill>
                   <a:srgbClr val="8C9BA9"/>
                 </a:solidFill>
                 <a:latin typeface="Arial"/>
               </a:rPr>
-              <a:t>03  LU ANG</a:t>
+              <a:t>03  鲁昂</a:t>
             </a:r>
           </a:p>
         </p:txBody>
@@ -8331,8 +8335,8 @@
         </p:blipFill>
         <p:spPr>
           <a:xfrm>
-            <a:off x="6181344" y="4114800"/>
-            <a:ext cx="1371600" cy="1371600"/>
+            <a:off x="6368796" y="5687568"/>
+            <a:ext cx="914400" cy="914400"/>
           </a:xfrm>
           <a:prstGeom prst="rect">
             <a:avLst/>
@@ -8347,8 +8351,8 @@
         </p:nvSpPr>
         <p:spPr>
           <a:xfrm>
-            <a:off x="6181344" y="4114800"/>
-            <a:ext cx="1371600" cy="1371600"/>
+            <a:off x="6368796" y="5687568"/>
+            <a:ext cx="914400" cy="914400"/>
           </a:xfrm>
           <a:prstGeom prst="rect">
             <a:avLst/>
@@ -8391,8 +8395,8 @@
         </p:nvSpPr>
         <p:spPr>
           <a:xfrm>
-            <a:off x="6181344" y="5541264"/>
-            <a:ext cx="1371600" cy="274320"/>
+            <a:off x="6368796" y="6629400"/>
+            <a:ext cx="914400" cy="228600"/>
           </a:xfrm>
           <a:prstGeom prst="rect">
             <a:avLst/>
@@ -8411,13 +8415,13 @@
               </a:spcAft>
             </a:pPr>
             <a:r>
-              <a:rPr sz="800" b="1" spc="100">
+              <a:rPr sz="1000" b="1">
                 <a:solidFill>
                   <a:srgbClr val="8C9BA9"/>
                 </a:solidFill>
                 <a:latin typeface="Arial"/>
               </a:rPr>
-              <a:t>04  ZHU ZHONGLE</a:t>
+              <a:t>04  朱钟乐</a:t>
             </a:r>
           </a:p>
         </p:txBody>
@@ -8438,8 +8442,8 @@
         </p:blipFill>
         <p:spPr>
           <a:xfrm>
-            <a:off x="8028431" y="4114800"/>
-            <a:ext cx="1371600" cy="1371600"/>
+            <a:off x="7831836" y="5687568"/>
+            <a:ext cx="914400" cy="914400"/>
           </a:xfrm>
           <a:prstGeom prst="rect">
             <a:avLst/>
@@ -8454,8 +8458,8 @@
         </p:nvSpPr>
         <p:spPr>
           <a:xfrm>
-            <a:off x="8028431" y="4114800"/>
-            <a:ext cx="1371600" cy="1371600"/>
+            <a:off x="7831836" y="5687568"/>
+            <a:ext cx="914400" cy="914400"/>
           </a:xfrm>
           <a:prstGeom prst="rect">
             <a:avLst/>
@@ -8498,8 +8502,8 @@
         </p:nvSpPr>
         <p:spPr>
           <a:xfrm>
-            <a:off x="8028431" y="5541264"/>
-            <a:ext cx="1371600" cy="274320"/>
+            <a:off x="7831836" y="6629400"/>
+            <a:ext cx="914400" cy="228600"/>
           </a:xfrm>
           <a:prstGeom prst="rect">
             <a:avLst/>
@@ -8518,13 +8522,13 @@
               </a:spcAft>
             </a:pPr>
             <a:r>
-              <a:rPr sz="800" b="1" spc="100">
+              <a:rPr sz="1000" b="1">
                 <a:solidFill>
                   <a:srgbClr val="8C9BA9"/>
                 </a:solidFill>
                 <a:latin typeface="Arial"/>
               </a:rPr>
-              <a:t>05  SHEN YICHENG</a:t>
+              <a:t>05  沈毅程</a:t>
             </a:r>
           </a:p>
         </p:txBody>
@@ -8545,8 +8549,8 @@
         </p:blipFill>
         <p:spPr>
           <a:xfrm>
-            <a:off x="9875519" y="4114800"/>
-            <a:ext cx="1371600" cy="1371600"/>
+            <a:off x="9294876" y="5687568"/>
+            <a:ext cx="914400" cy="914400"/>
           </a:xfrm>
           <a:prstGeom prst="rect">
             <a:avLst/>
@@ -8561,8 +8565,8 @@
         </p:nvSpPr>
         <p:spPr>
           <a:xfrm>
-            <a:off x="9875519" y="4114800"/>
-            <a:ext cx="1371600" cy="1371600"/>
+            <a:off x="9294876" y="5687568"/>
+            <a:ext cx="914400" cy="914400"/>
           </a:xfrm>
           <a:prstGeom prst="rect">
             <a:avLst/>
@@ -8605,8 +8609,8 @@
         </p:nvSpPr>
         <p:spPr>
           <a:xfrm>
-            <a:off x="9875519" y="5541264"/>
-            <a:ext cx="1371600" cy="274320"/>
+            <a:off x="9294876" y="6629400"/>
+            <a:ext cx="914400" cy="228600"/>
           </a:xfrm>
           <a:prstGeom prst="rect">
             <a:avLst/>
@@ -8625,36 +8629,178 @@
               </a:spcAft>
             </a:pPr>
             <a:r>
-              <a:rPr sz="800" b="1" spc="100">
+              <a:rPr sz="1000" b="1">
                 <a:solidFill>
                   <a:srgbClr val="8C9BA9"/>
                 </a:solidFill>
                 <a:latin typeface="Arial"/>
               </a:rPr>
-              <a:t>06  SHEN YUCHENG</a:t>
+              <a:t>06  沈煜辰</a:t>
+            </a:r>
+          </a:p>
+        </p:txBody>
+      </p:sp>
+    </p:spTree>
+  </p:cSld>
+  <p:clrMapOvr>
+    <a:masterClrMapping/>
+  </p:clrMapOvr>
+  <p:transition spd="slow">
+    <p:morph/>
+  </p:transition>
+</p:sld>
+</file>
+
+<file path=ppt/slides/slide6.xml><?xml version="1.0" encoding="utf-8"?>
+<p:sld xmlns:a="http://schemas.openxmlformats.org/drawingml/2006/main" xmlns:p="http://schemas.openxmlformats.org/presentationml/2006/main" xmlns:r="http://schemas.openxmlformats.org/officeDocument/2006/relationships">
+  <p:cSld>
+    <p:spTree>
+      <p:nvGrpSpPr>
+        <p:cNvPr id="1" name=""/>
+        <p:cNvGrpSpPr/>
+        <p:nvPr/>
+      </p:nvGrpSpPr>
+      <p:grpSpPr/>
+      <p:sp>
+        <p:nvSpPr>
+          <p:cNvPr id="2" name="Rectangle 1"/>
+          <p:cNvSpPr/>
+          <p:nvPr/>
+        </p:nvSpPr>
+        <p:spPr>
+          <a:xfrm>
+            <a:off x="0" y="0"/>
+            <a:ext cx="12192000" cy="6858000"/>
+          </a:xfrm>
+          <a:prstGeom prst="rect">
+            <a:avLst/>
+          </a:prstGeom>
+          <a:solidFill>
+            <a:srgbClr val="071525"/>
+          </a:solidFill>
+          <a:ln>
+            <a:noFill/>
+          </a:ln>
+          <a:effectLst/>
+        </p:spPr>
+        <p:style>
+          <a:lnRef idx="1">
+            <a:schemeClr val="accent1"/>
+          </a:lnRef>
+          <a:fillRef idx="3">
+            <a:schemeClr val="accent1"/>
+          </a:fillRef>
+          <a:effectRef idx="2">
+            <a:schemeClr val="accent1"/>
+          </a:effectRef>
+          <a:fontRef idx="minor">
+            <a:schemeClr val="lt1"/>
+          </a:fontRef>
+        </p:style>
+        <p:txBody>
+          <a:bodyPr rtlCol="0" anchor="ctr"/>
+          <a:lstStyle/>
+          <a:p>
+            <a:pPr algn="ctr"/>
+          </a:p>
+        </p:txBody>
+      </p:sp>
+      <p:sp>
+        <p:nvSpPr>
+          <p:cNvPr id="3" name="TextBox 2"/>
+          <p:cNvSpPr txBox="1"/>
+          <p:nvPr/>
+        </p:nvSpPr>
+        <p:spPr>
+          <a:xfrm>
+            <a:off x="548640" y="384048"/>
+            <a:ext cx="822960" cy="365760"/>
+          </a:xfrm>
+          <a:prstGeom prst="rect">
+            <a:avLst/>
+          </a:prstGeom>
+          <a:noFill/>
+        </p:spPr>
+        <p:txBody>
+          <a:bodyPr wrap="square" anchor="t" lIns="0" rIns="0" tIns="0" bIns="0">
+            <a:spAutoFit/>
+          </a:bodyPr>
+          <a:lstStyle/>
+          <a:p>
+            <a:pPr algn="l">
+              <a:spcAft>
+                <a:spcPts val="0"/>
+              </a:spcAft>
+            </a:pPr>
+            <a:r>
+              <a:rPr sz="1200" b="1">
+                <a:solidFill>
+                  <a:srgbClr val="D9A85B"/>
+                </a:solidFill>
+                <a:latin typeface="Arial"/>
+              </a:rPr>
+              <a:t>06</a:t>
+            </a:r>
+          </a:p>
+        </p:txBody>
+      </p:sp>
+      <p:sp>
+        <p:nvSpPr>
+          <p:cNvPr id="4" name="TextBox 3"/>
+          <p:cNvSpPr txBox="1"/>
+          <p:nvPr/>
+        </p:nvSpPr>
+        <p:spPr>
+          <a:xfrm>
+            <a:off x="1371600" y="429768"/>
+            <a:ext cx="7772400" cy="292608"/>
+          </a:xfrm>
+          <a:prstGeom prst="rect">
+            <a:avLst/>
+          </a:prstGeom>
+          <a:noFill/>
+        </p:spPr>
+        <p:txBody>
+          <a:bodyPr wrap="square" anchor="t" lIns="0" rIns="0" tIns="0" bIns="0">
+            <a:spAutoFit/>
+          </a:bodyPr>
+          <a:lstStyle/>
+          <a:p>
+            <a:pPr algn="l">
+              <a:spcAft>
+                <a:spcPts val="0"/>
+              </a:spcAft>
+            </a:pPr>
+            <a:r>
+              <a:rPr sz="1000" b="1" spc="400">
+                <a:solidFill>
+                  <a:srgbClr val="8C9BA9"/>
+                </a:solidFill>
+                <a:latin typeface="Arial"/>
+              </a:rPr>
+              <a:t>CONCLUSION</a:t>
             </a:r>
           </a:p>
         </p:txBody>
       </p:sp>
       <p:cxnSp>
         <p:nvCxnSpPr>
-          <p:cNvPr id="29" name="Connector 28"/>
+          <p:cNvPr id="5" name="Connector 4"/>
           <p:cNvCxnSpPr/>
           <p:nvPr/>
         </p:nvCxnSpPr>
         <p:spPr>
           <a:xfrm>
-            <a:off x="1325880" y="4800600"/>
-            <a:ext cx="8961120" cy="0"/>
+            <a:off x="548640" y="841248"/>
+            <a:ext cx="11091672" cy="0"/>
           </a:xfrm>
           <a:prstGeom prst="line">
             <a:avLst/>
           </a:prstGeom>
           <a:ln w="10160">
             <a:solidFill>
-              <a:srgbClr val="D9A85B"/>
+              <a:srgbClr val="0D2438"/>
             </a:solidFill>
-            <a:prstDash val="sysDot"/>
           </a:ln>
           <a:effectLst/>
         </p:spPr>
@@ -8673,16 +8819,91 @@
           </a:fontRef>
         </p:style>
       </p:cxnSp>
-      <p:sp>
-        <p:nvSpPr>
-          <p:cNvPr id="30" name="TextBox 29"/>
+      <p:cxnSp>
+        <p:nvCxnSpPr>
+          <p:cNvPr id="6" name="Connector 5"/>
+          <p:cNvCxnSpPr/>
+          <p:nvPr/>
+        </p:nvCxnSpPr>
+        <p:spPr>
+          <a:xfrm>
+            <a:off x="548640" y="841248"/>
+            <a:ext cx="9243060" cy="0"/>
+          </a:xfrm>
+          <a:prstGeom prst="line">
+            <a:avLst/>
+          </a:prstGeom>
+          <a:ln w="15240">
+            <a:solidFill>
+              <a:srgbClr val="D9A85B"/>
+            </a:solidFill>
+          </a:ln>
+          <a:effectLst/>
+        </p:spPr>
+        <p:style>
+          <a:lnRef idx="2">
+            <a:schemeClr val="accent1"/>
+          </a:lnRef>
+          <a:fillRef idx="0">
+            <a:schemeClr val="accent1"/>
+          </a:fillRef>
+          <a:effectRef idx="1">
+            <a:schemeClr val="accent1"/>
+          </a:effectRef>
+          <a:fontRef idx="minor">
+            <a:schemeClr val="tx1"/>
+          </a:fontRef>
+        </p:style>
+      </p:cxnSp>
+      <p:sp>
+        <p:nvSpPr>
+          <p:cNvPr id="7" name="TextBox 6"/>
           <p:cNvSpPr txBox="1"/>
           <p:nvPr/>
         </p:nvSpPr>
         <p:spPr>
           <a:xfrm>
-            <a:off x="640080" y="5989320"/>
-            <a:ext cx="6858000" cy="502920"/>
+            <a:off x="9326880" y="457200"/>
+            <a:ext cx="2679192" cy="256032"/>
+          </a:xfrm>
+          <a:prstGeom prst="rect">
+            <a:avLst/>
+          </a:prstGeom>
+          <a:noFill/>
+        </p:spPr>
+        <p:txBody>
+          <a:bodyPr wrap="square" anchor="t" lIns="0" rIns="0" tIns="0" bIns="0">
+            <a:spAutoFit/>
+          </a:bodyPr>
+          <a:lstStyle/>
+          <a:p>
+            <a:pPr algn="r">
+              <a:spcAft>
+                <a:spcPts val="0"/>
+              </a:spcAft>
+            </a:pPr>
+            <a:r>
+              <a:rPr sz="700" b="0" spc="200">
+                <a:solidFill>
+                  <a:srgbClr val="8C9BA9"/>
+                </a:solidFill>
+                <a:latin typeface="Arial"/>
+              </a:rPr>
+              <a:t>WATER CONNECTS EVERYTHING</a:t>
+            </a:r>
+          </a:p>
+        </p:txBody>
+      </p:sp>
+      <p:sp>
+        <p:nvSpPr>
+          <p:cNvPr id="8" name="TextBox 7"/>
+          <p:cNvSpPr txBox="1"/>
+          <p:nvPr/>
+        </p:nvSpPr>
+        <p:spPr>
+          <a:xfrm>
+            <a:off x="640080" y="1417320"/>
+            <a:ext cx="4114800" cy="457200"/>
           </a:xfrm>
           <a:prstGeom prst="rect">
             <a:avLst/>
@@ -8701,27 +8922,27 @@
               </a:spcAft>
             </a:pPr>
             <a:r>
-              <a:rPr sz="2400" b="1">
-                <a:solidFill>
-                  <a:srgbClr val="F5F2EA"/>
-                </a:solidFill>
-                <a:latin typeface="Georgia"/>
+              <a:rPr sz="1400" b="1" spc="400">
+                <a:solidFill>
+                  <a:srgbClr val="D9A85B"/>
+                </a:solidFill>
+                <a:latin typeface="Arial"/>
               </a:rPr>
-              <a:t>Water connects everything.</a:t>
-            </a:r>
-          </a:p>
-        </p:txBody>
-      </p:sp>
-      <p:sp>
-        <p:nvSpPr>
-          <p:cNvPr id="31" name="TextBox 30"/>
+              <a:t>SO WHAT?</a:t>
+            </a:r>
+          </a:p>
+        </p:txBody>
+      </p:sp>
+      <p:sp>
+        <p:nvSpPr>
+          <p:cNvPr id="9" name="TextBox 8"/>
           <p:cNvSpPr txBox="1"/>
           <p:nvPr/>
         </p:nvSpPr>
         <p:spPr>
           <a:xfrm>
-            <a:off x="640080" y="6492240"/>
-            <a:ext cx="7315200" cy="320040"/>
+            <a:off x="640080" y="2057400"/>
+            <a:ext cx="10881360" cy="1005840"/>
           </a:xfrm>
           <a:prstGeom prst="rect">
             <a:avLst/>
@@ -8740,105 +8961,27 @@
               </a:spcAft>
             </a:pPr>
             <a:r>
-              <a:rPr sz="1100" b="0">
-                <a:solidFill>
-                  <a:srgbClr val="8C9BA9"/>
+              <a:rPr sz="4000" b="1">
+                <a:solidFill>
+                  <a:srgbClr val="F5F2EA"/>
                 </a:solidFill>
                 <a:latin typeface="Georgia"/>
               </a:rPr>
-              <a:t>One team · one journey · Wuzhen waterways &amp; bridges</a:t>
-            </a:r>
-          </a:p>
-        </p:txBody>
-      </p:sp>
-      <p:sp>
-        <p:nvSpPr>
-          <p:cNvPr id="32" name="TextBox 31"/>
+              <a:t>WATER CONNECTS EVERYTHING.</a:t>
+            </a:r>
+          </a:p>
+        </p:txBody>
+      </p:sp>
+      <p:sp>
+        <p:nvSpPr>
+          <p:cNvPr id="10" name="TextBox 9"/>
           <p:cNvSpPr txBox="1"/>
           <p:nvPr/>
         </p:nvSpPr>
         <p:spPr>
           <a:xfrm>
-            <a:off x="7863840" y="5989320"/>
-            <a:ext cx="3776472" cy="457200"/>
-          </a:xfrm>
-          <a:prstGeom prst="rect">
-            <a:avLst/>
-          </a:prstGeom>
-          <a:noFill/>
-        </p:spPr>
-        <p:txBody>
-          <a:bodyPr wrap="square" anchor="t" lIns="0" rIns="0" tIns="0" bIns="0">
-            <a:spAutoFit/>
-          </a:bodyPr>
-          <a:lstStyle/>
-          <a:p>
-            <a:pPr algn="r">
-              <a:spcAft>
-                <a:spcPts val="0"/>
-              </a:spcAft>
-            </a:pPr>
-            <a:r>
-              <a:rPr sz="1200" b="1">
-                <a:solidFill>
-                  <a:srgbClr val="D9A85B"/>
-                </a:solidFill>
-                <a:latin typeface="Georgia"/>
-              </a:rPr>
-              <a:t>Why is water the main line of Wuzhen?</a:t>
-            </a:r>
-          </a:p>
-        </p:txBody>
-      </p:sp>
-      <p:sp>
-        <p:nvSpPr>
-          <p:cNvPr id="33" name="TextBox 32"/>
-          <p:cNvSpPr txBox="1"/>
-          <p:nvPr/>
-        </p:nvSpPr>
-        <p:spPr>
-          <a:xfrm>
-            <a:off x="7863840" y="6492240"/>
-            <a:ext cx="3776472" cy="320040"/>
-          </a:xfrm>
-          <a:prstGeom prst="rect">
-            <a:avLst/>
-          </a:prstGeom>
-          <a:noFill/>
-        </p:spPr>
-        <p:txBody>
-          <a:bodyPr wrap="square" anchor="t" lIns="0" rIns="0" tIns="0" bIns="0">
-            <a:spAutoFit/>
-          </a:bodyPr>
-          <a:lstStyle/>
-          <a:p>
-            <a:pPr algn="r">
-              <a:spcAft>
-                <a:spcPts val="0"/>
-              </a:spcAft>
-            </a:pPr>
-            <a:r>
-              <a:rPr sz="1400" b="1">
-                <a:solidFill>
-                  <a:srgbClr val="F5F2EA"/>
-                </a:solidFill>
-                <a:latin typeface="Georgia"/>
-              </a:rPr>
-              <a:t>Thank you.</a:t>
-            </a:r>
-          </a:p>
-        </p:txBody>
-      </p:sp>
-      <p:sp>
-        <p:nvSpPr>
-          <p:cNvPr id="34" name="TextBox 33"/>
-          <p:cNvSpPr txBox="1"/>
-          <p:nvPr/>
-        </p:nvSpPr>
-        <p:spPr>
-          <a:xfrm>
-            <a:off x="640080" y="5943600"/>
-            <a:ext cx="6858000" cy="274320"/>
+            <a:off x="640080" y="3108960"/>
+            <a:ext cx="10881360" cy="457200"/>
           </a:xfrm>
           <a:prstGeom prst="rect">
             <a:avLst/>
@@ -8857,27 +9000,27 @@
               </a:spcAft>
             </a:pPr>
             <a:r>
-              <a:rPr sz="900" b="0" spc="200">
-                <a:solidFill>
-                  <a:srgbClr val="D9A85B"/>
-                </a:solidFill>
-                <a:latin typeface="Arial"/>
+              <a:rPr sz="1500" b="0">
+                <a:solidFill>
+                  <a:srgbClr val="8C9BA9"/>
+                </a:solidFill>
+                <a:latin typeface="Georgia"/>
               </a:rPr>
-              <a:t>SOURCES</a:t>
-            </a:r>
-          </a:p>
-        </p:txBody>
-      </p:sp>
-      <p:sp>
-        <p:nvSpPr>
-          <p:cNvPr id="35" name="TextBox 34"/>
+              <a:t>One team · one journey · Wuzhen waterways &amp; bridges.</a:t>
+            </a:r>
+          </a:p>
+        </p:txBody>
+      </p:sp>
+      <p:sp>
+        <p:nvSpPr>
+          <p:cNvPr id="11" name="TextBox 10"/>
           <p:cNvSpPr txBox="1"/>
           <p:nvPr/>
         </p:nvSpPr>
         <p:spPr>
           <a:xfrm>
-            <a:off x="640080" y="6217920"/>
-            <a:ext cx="6858000" cy="274320"/>
+            <a:off x="640080" y="3703320"/>
+            <a:ext cx="10881360" cy="457200"/>
           </a:xfrm>
           <a:prstGeom prst="rect">
             <a:avLst/>
@@ -8896,27 +9039,27 @@
               </a:spcAft>
             </a:pPr>
             <a:r>
-              <a:rPr sz="800" b="1">
-                <a:solidFill>
-                  <a:srgbClr val="8C9BA9"/>
-                </a:solidFill>
-                <a:latin typeface="Arial"/>
+              <a:rPr sz="2000" b="1">
+                <a:solidFill>
+                  <a:srgbClr val="D9A85B"/>
+                </a:solidFill>
+                <a:latin typeface="Georgia"/>
               </a:rPr>
-              <a:t>Canal — 韩笃一 · CC BY-SA 3.0 · Wikimedia Commons</a:t>
-            </a:r>
-          </a:p>
-        </p:txBody>
-      </p:sp>
-      <p:sp>
-        <p:nvSpPr>
-          <p:cNvPr id="36" name="TextBox 35"/>
+              <a:t>Why is water the main line of Wuzhen?</a:t>
+            </a:r>
+          </a:p>
+        </p:txBody>
+      </p:sp>
+      <p:sp>
+        <p:nvSpPr>
+          <p:cNvPr id="12" name="TextBox 11"/>
           <p:cNvSpPr txBox="1"/>
           <p:nvPr/>
         </p:nvSpPr>
         <p:spPr>
           <a:xfrm>
-            <a:off x="640080" y="6492240"/>
-            <a:ext cx="6858000" cy="274320"/>
+            <a:off x="640080" y="4297680"/>
+            <a:ext cx="3657600" cy="548640"/>
           </a:xfrm>
           <a:prstGeom prst="rect">
             <a:avLst/>
@@ -8935,26 +9078,26 @@
               </a:spcAft>
             </a:pPr>
             <a:r>
-              <a:rPr sz="800" b="1">
-                <a:solidFill>
-                  <a:srgbClr val="8C9BA9"/>
-                </a:solidFill>
-                <a:latin typeface="Arial"/>
+              <a:rPr sz="2600" b="1">
+                <a:solidFill>
+                  <a:srgbClr val="F5F2EA"/>
+                </a:solidFill>
+                <a:latin typeface="Georgia"/>
               </a:rPr>
-              <a:t>Bridge — Immanuel Giel · CC BY-SA 4.0 · Wikimedia Commons</a:t>
-            </a:r>
-          </a:p>
-        </p:txBody>
-      </p:sp>
-      <p:sp>
-        <p:nvSpPr>
-          <p:cNvPr id="37" name="TextBox 36"/>
+              <a:t>Thank you.</a:t>
+            </a:r>
+          </a:p>
+        </p:txBody>
+      </p:sp>
+      <p:sp>
+        <p:nvSpPr>
+          <p:cNvPr id="13" name="TextBox 12"/>
           <p:cNvSpPr txBox="1"/>
           <p:nvPr/>
         </p:nvSpPr>
         <p:spPr>
           <a:xfrm>
-            <a:off x="640080" y="6766560"/>
+            <a:off x="640080" y="5029200"/>
             <a:ext cx="6858000" cy="274320"/>
           </a:xfrm>
           <a:prstGeom prst="rect">
@@ -8974,26 +9117,26 @@
               </a:spcAft>
             </a:pPr>
             <a:r>
-              <a:rPr sz="800" b="1">
-                <a:solidFill>
-                  <a:srgbClr val="8C9BA9"/>
+              <a:rPr sz="1000" b="0" spc="200">
+                <a:solidFill>
+                  <a:srgbClr val="D9A85B"/>
                 </a:solidFill>
                 <a:latin typeface="Arial"/>
               </a:rPr>
-              <a:t>Boat — Jakub Hałun · CC BY-SA 3.0 · Wikimedia Commons</a:t>
-            </a:r>
-          </a:p>
-        </p:txBody>
-      </p:sp>
-      <p:sp>
-        <p:nvSpPr>
-          <p:cNvPr id="38" name="TextBox 37"/>
+              <a:t>SOURCES</a:t>
+            </a:r>
+          </a:p>
+        </p:txBody>
+      </p:sp>
+      <p:sp>
+        <p:nvSpPr>
+          <p:cNvPr id="14" name="TextBox 13"/>
           <p:cNvSpPr txBox="1"/>
           <p:nvPr/>
         </p:nvSpPr>
         <p:spPr>
           <a:xfrm>
-            <a:off x="640080" y="7040880"/>
+            <a:off x="640080" y="5330952"/>
             <a:ext cx="6858000" cy="274320"/>
           </a:xfrm>
           <a:prstGeom prst="rect">
@@ -9013,26 +9156,26 @@
               </a:spcAft>
             </a:pPr>
             <a:r>
-              <a:rPr sz="800" b="1">
+              <a:rPr sz="900" b="1">
                 <a:solidFill>
                   <a:srgbClr val="8C9BA9"/>
                 </a:solidFill>
                 <a:latin typeface="Arial"/>
               </a:rPr>
-              <a:t>Night — Nico le terrible · CC0 · Wikimedia Commons</a:t>
-            </a:r>
-          </a:p>
-        </p:txBody>
-      </p:sp>
-      <p:sp>
-        <p:nvSpPr>
-          <p:cNvPr id="39" name="TextBox 38"/>
+              <a:t>Canal — 韩笃一 · CC BY-SA 3.0 · Wikimedia Commons</a:t>
+            </a:r>
+          </a:p>
+        </p:txBody>
+      </p:sp>
+      <p:sp>
+        <p:nvSpPr>
+          <p:cNvPr id="15" name="TextBox 14"/>
           <p:cNvSpPr txBox="1"/>
           <p:nvPr/>
         </p:nvSpPr>
         <p:spPr>
           <a:xfrm>
-            <a:off x="640080" y="7315200"/>
+            <a:off x="640080" y="5632704"/>
             <a:ext cx="6858000" cy="274320"/>
           </a:xfrm>
           <a:prstGeom prst="rect">
@@ -9052,20 +9195,137 @@
               </a:spcAft>
             </a:pPr>
             <a:r>
-              <a:rPr sz="800" b="1">
+              <a:rPr sz="900" b="1">
                 <a:solidFill>
                   <a:srgbClr val="8C9BA9"/>
                 </a:solidFill>
                 <a:latin typeface="Arial"/>
               </a:rPr>
-              <a:t>Team photos — group portrait, 2026</a:t>
-            </a:r>
-          </a:p>
-        </p:txBody>
-      </p:sp>
-      <p:sp>
-        <p:nvSpPr>
-          <p:cNvPr id="40" name="TextBox 39"/>
+              <a:t>Bridge — Immanuel Giel · CC BY-SA 4.0 · Wikimedia Commons</a:t>
+            </a:r>
+          </a:p>
+        </p:txBody>
+      </p:sp>
+      <p:sp>
+        <p:nvSpPr>
+          <p:cNvPr id="16" name="TextBox 15"/>
+          <p:cNvSpPr txBox="1"/>
+          <p:nvPr/>
+        </p:nvSpPr>
+        <p:spPr>
+          <a:xfrm>
+            <a:off x="640080" y="5934456"/>
+            <a:ext cx="6858000" cy="274320"/>
+          </a:xfrm>
+          <a:prstGeom prst="rect">
+            <a:avLst/>
+          </a:prstGeom>
+          <a:noFill/>
+        </p:spPr>
+        <p:txBody>
+          <a:bodyPr wrap="square" anchor="t" lIns="0" rIns="0" tIns="0" bIns="0">
+            <a:spAutoFit/>
+          </a:bodyPr>
+          <a:lstStyle/>
+          <a:p>
+            <a:pPr algn="l">
+              <a:spcAft>
+                <a:spcPts val="0"/>
+              </a:spcAft>
+            </a:pPr>
+            <a:r>
+              <a:rPr sz="900" b="1">
+                <a:solidFill>
+                  <a:srgbClr val="8C9BA9"/>
+                </a:solidFill>
+                <a:latin typeface="Arial"/>
+              </a:rPr>
+              <a:t>Boat — Jakub Hałun · CC BY-SA 3.0 · Wikimedia Commons</a:t>
+            </a:r>
+          </a:p>
+        </p:txBody>
+      </p:sp>
+      <p:sp>
+        <p:nvSpPr>
+          <p:cNvPr id="17" name="TextBox 16"/>
+          <p:cNvSpPr txBox="1"/>
+          <p:nvPr/>
+        </p:nvSpPr>
+        <p:spPr>
+          <a:xfrm>
+            <a:off x="640080" y="6236208"/>
+            <a:ext cx="6858000" cy="274320"/>
+          </a:xfrm>
+          <a:prstGeom prst="rect">
+            <a:avLst/>
+          </a:prstGeom>
+          <a:noFill/>
+        </p:spPr>
+        <p:txBody>
+          <a:bodyPr wrap="square" anchor="t" lIns="0" rIns="0" tIns="0" bIns="0">
+            <a:spAutoFit/>
+          </a:bodyPr>
+          <a:lstStyle/>
+          <a:p>
+            <a:pPr algn="l">
+              <a:spcAft>
+                <a:spcPts val="0"/>
+              </a:spcAft>
+            </a:pPr>
+            <a:r>
+              <a:rPr sz="900" b="1">
+                <a:solidFill>
+                  <a:srgbClr val="8C9BA9"/>
+                </a:solidFill>
+                <a:latin typeface="Arial"/>
+              </a:rPr>
+              <a:t>Night — Nico le terrible · CC0 · Wikimedia Commons</a:t>
+            </a:r>
+          </a:p>
+        </p:txBody>
+      </p:sp>
+      <p:sp>
+        <p:nvSpPr>
+          <p:cNvPr id="18" name="TextBox 17"/>
+          <p:cNvSpPr txBox="1"/>
+          <p:nvPr/>
+        </p:nvSpPr>
+        <p:spPr>
+          <a:xfrm>
+            <a:off x="640080" y="6537960"/>
+            <a:ext cx="6858000" cy="274320"/>
+          </a:xfrm>
+          <a:prstGeom prst="rect">
+            <a:avLst/>
+          </a:prstGeom>
+          <a:noFill/>
+        </p:spPr>
+        <p:txBody>
+          <a:bodyPr wrap="square" anchor="t" lIns="0" rIns="0" tIns="0" bIns="0">
+            <a:spAutoFit/>
+          </a:bodyPr>
+          <a:lstStyle/>
+          <a:p>
+            <a:pPr algn="l">
+              <a:spcAft>
+                <a:spcPts val="0"/>
+              </a:spcAft>
+            </a:pPr>
+            <a:r>
+              <a:rPr sz="900" b="1">
+                <a:solidFill>
+                  <a:srgbClr val="8C9BA9"/>
+                </a:solidFill>
+                <a:latin typeface="Arial"/>
+              </a:rPr>
+              <a:t>Team photo — group portrait, 2026</a:t>
+            </a:r>
+          </a:p>
+        </p:txBody>
+      </p:sp>
+      <p:sp>
+        <p:nvSpPr>
+          <p:cNvPr id="19" name="TextBox 18"/>
           <p:cNvSpPr txBox="1"/>
           <p:nvPr/>
         </p:nvSpPr>
